--- a/apps/resources/bundled_files/3-klass-mamycha-koshuu-kemituu-sabak.pptx
+++ b/apps/resources/bundled_files/3-klass-mamycha-koshuu-kemituu-sabak.pptx
@@ -5196,7 +5196,7 @@
                 </a:solidFill>
                 <a:latin typeface="PT Sans"/>
               </a:rPr>
-              <a:t>3-класс · Математика</a:t>
+              <a:t/>
             </a:r>
           </a:p>
         </p:txBody>
@@ -5688,7 +5688,7 @@
                 </a:solidFill>
                 <a:latin typeface="PT Sans"/>
               </a:rPr>
-              <a:t>3-класс ›</a:t>
+              <a:t/>
             </a:r>
           </a:p>
           <a:p>
@@ -6637,7 +6637,7 @@
                 </a:solidFill>
                 <a:latin typeface="PT Sans"/>
               </a:rPr>
-              <a:t>3-класс ›</a:t>
+              <a:t/>
             </a:r>
           </a:p>
           <a:p>
@@ -9850,7 +9850,7 @@
                 </a:solidFill>
                 <a:latin typeface="PT Sans"/>
               </a:rPr>
-              <a:t>3-класс ›</a:t>
+              <a:t/>
             </a:r>
           </a:p>
           <a:p>
@@ -12252,7 +12252,7 @@
                 </a:solidFill>
                 <a:latin typeface="PT Sans"/>
               </a:rPr>
-              <a:t>3-класс ›</a:t>
+              <a:t/>
             </a:r>
           </a:p>
           <a:p>
@@ -13582,7 +13582,7 @@
                 </a:solidFill>
                 <a:latin typeface="PT Sans"/>
               </a:rPr>
-              <a:t>3-класс ›</a:t>
+              <a:t/>
             </a:r>
           </a:p>
           <a:p>
@@ -14333,7 +14333,7 @@
                 </a:solidFill>
                 <a:latin typeface="PT Sans"/>
               </a:rPr>
-              <a:t>3-класс ›</a:t>
+              <a:t/>
             </a:r>
           </a:p>
           <a:p>
@@ -15084,7 +15084,7 @@
                 </a:solidFill>
                 <a:latin typeface="PT Sans"/>
               </a:rPr>
-              <a:t>3-класс ›</a:t>
+              <a:t/>
             </a:r>
           </a:p>
           <a:p>
@@ -16633,7 +16633,7 @@
                 </a:solidFill>
                 <a:latin typeface="PT Sans"/>
               </a:rPr>
-              <a:t>3-класс ›</a:t>
+              <a:t/>
             </a:r>
           </a:p>
           <a:p>
@@ -17717,7 +17717,7 @@
                 </a:solidFill>
                 <a:latin typeface="PT Sans"/>
               </a:rPr>
-              <a:t>3-класс ›</a:t>
+              <a:t/>
             </a:r>
           </a:p>
           <a:p>
@@ -19247,7 +19247,7 @@
                 </a:solidFill>
                 <a:latin typeface="PT Sans"/>
               </a:rPr>
-              <a:t>3-класс ›</a:t>
+              <a:t/>
             </a:r>
           </a:p>
           <a:p>
@@ -21118,7 +21118,7 @@
                 </a:solidFill>
                 <a:latin typeface="PT Sans"/>
               </a:rPr>
-              <a:t>3-класс ›</a:t>
+              <a:t/>
             </a:r>
           </a:p>
           <a:p>
@@ -22395,7 +22395,7 @@
                 </a:solidFill>
                 <a:latin typeface="PT Sans"/>
               </a:rPr>
-              <a:t>3-класс ›</a:t>
+              <a:t/>
             </a:r>
           </a:p>
           <a:p>
@@ -23823,7 +23823,7 @@
                 </a:solidFill>
                 <a:latin typeface="PT Sans"/>
               </a:rPr>
-              <a:t>3-класс ›</a:t>
+              <a:t/>
             </a:r>
           </a:p>
           <a:p>
@@ -25279,7 +25279,7 @@
                 </a:solidFill>
                 <a:latin typeface="PT Sans"/>
               </a:rPr>
-              <a:t>3-класс ›</a:t>
+              <a:t/>
             </a:r>
           </a:p>
           <a:p>
@@ -26326,7 +26326,7 @@
                 </a:solidFill>
                 <a:latin typeface="PT Sans"/>
               </a:rPr>
-              <a:t>3-класс ›</a:t>
+              <a:t/>
             </a:r>
           </a:p>
           <a:p>
@@ -27126,7 +27126,7 @@
                 </a:solidFill>
                 <a:latin typeface="PT Sans"/>
               </a:rPr>
-              <a:t>3-класс ›</a:t>
+              <a:t/>
             </a:r>
           </a:p>
           <a:p>
@@ -27967,7 +27967,7 @@
                 </a:solidFill>
                 <a:latin typeface="PT Sans"/>
               </a:rPr>
-              <a:t>3-класс ›</a:t>
+              <a:t/>
             </a:r>
           </a:p>
           <a:p>
@@ -28916,7 +28916,7 @@
                 </a:solidFill>
                 <a:latin typeface="PT Sans"/>
               </a:rPr>
-              <a:t>3-класс ›</a:t>
+              <a:t/>
             </a:r>
           </a:p>
           <a:p>
@@ -30370,7 +30370,7 @@
                 </a:solidFill>
                 <a:latin typeface="PT Sans"/>
               </a:rPr>
-              <a:t>3-класс ›</a:t>
+              <a:t/>
             </a:r>
           </a:p>
           <a:p>
@@ -31116,7 +31116,7 @@
                 </a:solidFill>
                 <a:latin typeface="PT Sans"/>
               </a:rPr>
-              <a:t>3-класс ›</a:t>
+              <a:t/>
             </a:r>
           </a:p>
           <a:p>
@@ -31924,7 +31924,7 @@
                 </a:solidFill>
                 <a:latin typeface="PT Sans"/>
               </a:rPr>
-              <a:t>3-класс ›</a:t>
+              <a:t/>
             </a:r>
           </a:p>
           <a:p>
@@ -33115,7 +33115,7 @@
                 </a:solidFill>
                 <a:latin typeface="PT Sans"/>
               </a:rPr>
-              <a:t>3-класс ›</a:t>
+              <a:t/>
             </a:r>
           </a:p>
           <a:p>
@@ -34294,7 +34294,7 @@
                 </a:solidFill>
                 <a:latin typeface="PT Sans"/>
               </a:rPr>
-              <a:t>3-класс ›</a:t>
+              <a:t/>
             </a:r>
           </a:p>
           <a:p>
@@ -34475,7 +34475,7 @@
                 </a:solidFill>
                 <a:latin typeface="PT Sans"/>
               </a:rPr>
-              <a:t>2-класс</a:t>
+              <a:t/>
             </a:r>
           </a:p>
         </p:txBody>
@@ -34636,7 +34636,7 @@
                 </a:solidFill>
                 <a:latin typeface="PT Sans"/>
               </a:rPr>
-              <a:t>3-класс</a:t>
+              <a:t/>
             </a:r>
           </a:p>
         </p:txBody>
@@ -34872,7 +34872,7 @@
                 </a:solidFill>
                 <a:latin typeface="PT Sans"/>
               </a:rPr>
-              <a:t>4-класс</a:t>
+              <a:t/>
             </a:r>
           </a:p>
         </p:txBody>
@@ -35034,7 +35034,7 @@
                 </a:solidFill>
                 <a:latin typeface="PT Sans"/>
               </a:rPr>
-              <a:t>5-класс</a:t>
+              <a:t/>
             </a:r>
           </a:p>
         </p:txBody>
@@ -35435,7 +35435,7 @@
                 </a:solidFill>
                 <a:latin typeface="PT Sans"/>
               </a:rPr>
-              <a:t>3-класс ›</a:t>
+              <a:t/>
             </a:r>
           </a:p>
           <a:p>
@@ -36583,7 +36583,7 @@
                 </a:solidFill>
                 <a:latin typeface="PT Sans"/>
               </a:rPr>
-              <a:t>3-класс ›</a:t>
+              <a:t/>
             </a:r>
           </a:p>
           <a:p>

--- a/apps/resources/bundled_files/3-klass-mamycha-koshuu-kemituu-sabak.pptx
+++ b/apps/resources/bundled_files/3-klass-mamycha-koshuu-kemituu-sabak.pptx
@@ -1582,7 +1582,7 @@
           <a:lstStyle/>
           <a:p>
             <a:r>
-              <a:t>Ой жүгүртүү маданияты (Wenxi Lee, 2.6).</a:t>
+              <a:t>Ой жүгүртүү маданияты (Wenxi Lee, 2,6).</a:t>
             </a:r>
           </a:p>
         </p:txBody>
